--- a/content/W01/D1/slides/C2_W01_D01_half2_STUDENT.pptx
+++ b/content/W01/D1/slides/C2_W01_D01_half2_STUDENT.pptx
@@ -4905,14 +4905,14 @@
       </p:sp>
       <p:pic>
         <p:nvPicPr>
-          <p:cNvPr id="6" name="Picture 5" descr="c9f4e44c8bf45b39.png"/>
+          <p:cNvPr id="6" name="Picture 5" descr="885c5b45ddbb4b93.png"/>
           <p:cNvPicPr>
             <a:picLocks noChangeAspect="1"/>
           </p:cNvPicPr>
           <p:nvPr/>
         </p:nvPicPr>
         <p:blipFill>
-          <a:blip r:embed="rId2"/>
+          <a:blip r:embed="rId3"/>
           <a:stretch>
             <a:fillRect/>
           </a:stretch>
@@ -7393,14 +7393,14 @@
       </p:sp>
       <p:pic>
         <p:nvPicPr>
-          <p:cNvPr id="6" name="Picture 5" descr="b12edc475e6cb680.png"/>
+          <p:cNvPr id="6" name="Picture 5" descr="fe3d8a680ad229d6.png"/>
           <p:cNvPicPr>
             <a:picLocks noChangeAspect="1"/>
           </p:cNvPicPr>
           <p:nvPr/>
         </p:nvPicPr>
         <p:blipFill>
-          <a:blip r:embed="rId2"/>
+          <a:blip r:embed="rId3"/>
           <a:stretch>
             <a:fillRect/>
           </a:stretch>
@@ -8123,14 +8123,14 @@
       </p:sp>
       <p:pic>
         <p:nvPicPr>
-          <p:cNvPr id="6" name="Picture 5" descr="00074e4718beb3be.png"/>
+          <p:cNvPr id="6" name="Picture 5" descr="93f4b87a0f2f1292.png"/>
           <p:cNvPicPr>
             <a:picLocks noChangeAspect="1"/>
           </p:cNvPicPr>
           <p:nvPr/>
         </p:nvPicPr>
         <p:blipFill>
-          <a:blip r:embed="rId2"/>
+          <a:blip r:embed="rId3"/>
           <a:stretch>
             <a:fillRect/>
           </a:stretch>
@@ -9364,14 +9364,14 @@
       </p:sp>
       <p:pic>
         <p:nvPicPr>
-          <p:cNvPr id="6" name="Picture 5" descr="333a3c372ed01e88.png"/>
+          <p:cNvPr id="6" name="Picture 5" descr="6479402129ce9d18.png"/>
           <p:cNvPicPr>
             <a:picLocks noChangeAspect="1"/>
           </p:cNvPicPr>
           <p:nvPr/>
         </p:nvPicPr>
         <p:blipFill>
-          <a:blip r:embed="rId2"/>
+          <a:blip r:embed="rId3"/>
           <a:stretch>
             <a:fillRect/>
           </a:stretch>
@@ -11926,14 +11926,14 @@
       </p:sp>
       <p:pic>
         <p:nvPicPr>
-          <p:cNvPr id="6" name="Picture 5" descr="88928623632893fe.png"/>
+          <p:cNvPr id="6" name="Picture 5" descr="e2bae904dbbf6816.png"/>
           <p:cNvPicPr>
             <a:picLocks noChangeAspect="1"/>
           </p:cNvPicPr>
           <p:nvPr/>
         </p:nvPicPr>
         <p:blipFill>
-          <a:blip r:embed="rId2"/>
+          <a:blip r:embed="rId3"/>
           <a:stretch>
             <a:fillRect/>
           </a:stretch>

--- a/content/W01/D1/slides/C2_W01_D01_half2_STUDENT.pptx
+++ b/content/W01/D1/slides/C2_W01_D01_half2_STUDENT.pptx
@@ -4905,7 +4905,7 @@
       </p:sp>
       <p:pic>
         <p:nvPicPr>
-          <p:cNvPr id="6" name="Picture 5" descr="885c5b45ddbb4b93.png"/>
+          <p:cNvPr id="6" name="Picture 5" descr="c6c87fb35aeacd17.png"/>
           <p:cNvPicPr>
             <a:picLocks noChangeAspect="1"/>
           </p:cNvPicPr>
@@ -4919,8 +4919,8 @@
         </p:blipFill>
         <p:spPr>
           <a:xfrm>
-            <a:off x="685800" y="2519211"/>
-            <a:ext cx="10820095" cy="1585897"/>
+            <a:off x="685800" y="2586136"/>
+            <a:ext cx="10820095" cy="1452047"/>
           </a:xfrm>
           <a:prstGeom prst="rect">
             <a:avLst/>
@@ -4935,7 +4935,7 @@
         </p:nvSpPr>
         <p:spPr>
           <a:xfrm>
-            <a:off x="685800" y="4251412"/>
+            <a:off x="685800" y="4184487"/>
             <a:ext cx="10820095" cy="910336"/>
           </a:xfrm>
           <a:prstGeom prst="rect">
@@ -7393,7 +7393,7 @@
       </p:sp>
       <p:pic>
         <p:nvPicPr>
-          <p:cNvPr id="6" name="Picture 5" descr="fe3d8a680ad229d6.png"/>
+          <p:cNvPr id="6" name="Picture 5" descr="db448f16c2eab75e.png"/>
           <p:cNvPicPr>
             <a:picLocks noChangeAspect="1"/>
           </p:cNvPicPr>
@@ -7408,7 +7408,7 @@
         <p:spPr>
           <a:xfrm>
             <a:off x="685800" y="1627632"/>
-            <a:ext cx="10820095" cy="3204620"/>
+            <a:ext cx="10820095" cy="3435967"/>
           </a:xfrm>
           <a:prstGeom prst="rect">
             <a:avLst/>
@@ -7423,8 +7423,8 @@
         </p:nvSpPr>
         <p:spPr>
           <a:xfrm>
-            <a:off x="685800" y="4978556"/>
-            <a:ext cx="10820095" cy="910336"/>
+            <a:off x="685800" y="5209903"/>
+            <a:ext cx="10820095" cy="513080"/>
           </a:xfrm>
           <a:prstGeom prst="rect">
             <a:avLst/>
@@ -7439,11 +7439,11 @@
           <a:p>
             <a:pPr>
               <a:spcAft>
-                <a:spcPts val="900"/>
+                <a:spcPts val="800"/>
               </a:spcAft>
             </a:pPr>
             <a:r>
-              <a:rPr sz="2000" b="0">
+              <a:rPr sz="1700" b="0">
                 <a:solidFill>
                   <a:srgbClr val="1C1C1A"/>
                 </a:solidFill>
@@ -8123,7 +8123,7 @@
       </p:sp>
       <p:pic>
         <p:nvPicPr>
-          <p:cNvPr id="6" name="Picture 5" descr="93f4b87a0f2f1292.png"/>
+          <p:cNvPr id="6" name="Picture 5" descr="809b96c92e1ba4bf.png"/>
           <p:cNvPicPr>
             <a:picLocks noChangeAspect="1"/>
           </p:cNvPicPr>
@@ -8137,8 +8137,8 @@
         </p:blipFill>
         <p:spPr>
           <a:xfrm>
-            <a:off x="2165402" y="3675887"/>
-            <a:ext cx="7860890" cy="2377440"/>
+            <a:off x="2261266" y="3675887"/>
+            <a:ext cx="7669161" cy="2377440"/>
           </a:xfrm>
           <a:prstGeom prst="rect">
             <a:avLst/>
@@ -9364,7 +9364,7 @@
       </p:sp>
       <p:pic>
         <p:nvPicPr>
-          <p:cNvPr id="6" name="Picture 5" descr="6479402129ce9d18.png"/>
+          <p:cNvPr id="6" name="Picture 5" descr="07ada511c1bb4323.png"/>
           <p:cNvPicPr>
             <a:picLocks noChangeAspect="1"/>
           </p:cNvPicPr>
@@ -9378,8 +9378,8 @@
         </p:blipFill>
         <p:spPr>
           <a:xfrm>
-            <a:off x="2545119" y="1517904"/>
-            <a:ext cx="7101456" cy="4016248"/>
+            <a:off x="3302729" y="1517904"/>
+            <a:ext cx="5586235" cy="4016248"/>
           </a:xfrm>
           <a:prstGeom prst="rect">
             <a:avLst/>
@@ -11926,7 +11926,7 @@
       </p:sp>
       <p:pic>
         <p:nvPicPr>
-          <p:cNvPr id="6" name="Picture 5" descr="e2bae904dbbf6816.png"/>
+          <p:cNvPr id="6" name="Picture 5" descr="e596ea54f4beec1f.png"/>
           <p:cNvPicPr>
             <a:picLocks noChangeAspect="1"/>
           </p:cNvPicPr>

--- a/content/W01/D1/slides/C2_W01_D01_half2_STUDENT.pptx
+++ b/content/W01/D1/slides/C2_W01_D01_half2_STUDENT.pptx
@@ -25437,7 +25437,7 @@
                 </a:solidFill>
                 <a:latin typeface="Georgia"/>
               </a:rPr>
-              <a:t>Kahoot: six questions, no marks</a:t>
+              <a:t>Kahoot: six questions, ungraded</a:t>
             </a:r>
           </a:p>
         </p:txBody>
@@ -25691,7 +25691,7 @@
                 </a:solidFill>
                 <a:latin typeface="Calibri"/>
               </a:rPr>
-              <a:t>MARKS</a:t>
+              <a:t>SCORES RECORDED</a:t>
             </a:r>
           </a:p>
         </p:txBody>

--- a/content/W01/D1/slides/C2_W01_D01_half2_STUDENT.pptx
+++ b/content/W01/D1/slides/C2_W01_D01_half2_STUDENT.pptx
@@ -3367,12 +3367,17 @@
           <a:lstStyle/>
           <a:p>
             <a:r>
-              <a:t>LIVE, 3 minutes. Read Meera's reply and stop; Tuesday's file settles it. Remind the room of the</a:t>
-            </a:r>
-          </a:p>
-          <a:p>
-            <a:r>
-              <a:t>take-home and the pre-read, and that the practice lab follows with the TA.</a:t>
+              <a:t>LIVE, 3 minutes. Read Meera's reply and stop; Tuesday's file settles it. Hand out the domain card</a:t>
+            </a:r>
+          </a:p>
+          <a:p>
+            <a:r>
+              <a:t>now, one per learner. Remind the room of the take-home and the pre-read, and that the practice lab</a:t>
+            </a:r>
+          </a:p>
+          <a:p>
+            <a:r>
+              <a:t>follows with the TA.</a:t>
             </a:r>
           </a:p>
         </p:txBody>

--- a/content/W01/D1/slides/C2_W01_D01_half2_STUDENT.pptx
+++ b/content/W01/D1/slides/C2_W01_D01_half2_STUDENT.pptx
@@ -702,12 +702,12 @@
           <a:lstStyle/>
           <a:p>
             <a:r>
-              <a:t>LIVE, 30 minutes: the need (3), the options (5), the trap (10), the build (6), the second route</a:t>
-            </a:r>
-          </a:p>
-          <a:p>
-            <a:r>
-              <a:t>(3), Kavya's review (3). Notebook 06 is the demonstration.</a:t>
+              <a:t>LIVE, 30 minutes: the need (3), the options (5), the build (4), the trap and the fix (12), the</a:t>
+            </a:r>
+          </a:p>
+          <a:p>
+            <a:r>
+              <a:t>second route (3), Kavya's review (3). Notebook 06 is the demonstration.</a:t>
             </a:r>
           </a:p>
         </p:txBody>
@@ -1097,7 +1097,12 @@
           <a:lstStyle/>
           <a:p>
             <a:r>
-              <a:t>LIVE, 2 minutes. Letters by hand. Most pick a. Ask the question marketing would ask: how long do</a:t>
+              <a:t>LIVE, 2 minutes. Present the 70 percent as the colleague's tightened draft of S12's sentence, which is how it</a:t>
+            </a:r>
+          </a:p>
+          <a:p>
+            <a:r>
+              <a:t>would reach Meera. Take letters by hand; most pick a. Ask the question marketing would ask: how long do</a:t>
             </a:r>
           </a:p>
           <a:p>
@@ -1427,7 +1432,7 @@
           <a:lstStyle/>
           <a:p>
             <a:r>
-              <a:t>LIVE, 30 minutes: the need (3), the options sized (8), the build (4), the trap (8), the second</a:t>
+              <a:t>LIVE, 30 minutes: the need (3), the options sized (7), the build (5), the trap (8), the second</a:t>
             </a:r>
           </a:p>
           <a:p>
@@ -1572,7 +1577,7 @@
           <a:lstStyle/>
           <a:p>
             <a:r>
-              <a:t>LIVE, 35 minutes: 3 to brief on S18 and S19, 30 alone with no slides. The support TA answers</a:t>
+              <a:t>LIVE, 35 minutes: 5 to brief on S18 and S19, 30 alone with no slides. The support TA answers</a:t>
             </a:r>
           </a:p>
           <a:p>
@@ -1647,17 +1652,22 @@
           <a:lstStyle/>
           <a:p>
             <a:r>
-              <a:t>LIVE, 3 minutes. The brief is exercises/unguided/C2_W01_D01_escalated_case_STUDENT.md and the</a:t>
-            </a:r>
-          </a:p>
-          <a:p>
-            <a:r>
-              <a:t>notebook is notebooks/C2_W01_D01_ex1_escalated_case_STUDENT.ipynb. Each learner posts nine</a:t>
-            </a:r>
-          </a:p>
-          <a:p>
-            <a:r>
-              <a:t>letters, the numbers each part asks for, and the sentence.</a:t>
+              <a:t>LIVE, 5 minutes. The brief is exercises/unguided/C2_W01_D01_escalated_case_STUDENT.md and the</a:t>
+            </a:r>
+          </a:p>
+          <a:p>
+            <a:r>
+              <a:t>notebook is notebooks/C2_W01_D01_ex1_escalated_case_STUDENT.ipynb. Each learner posts the</a:t>
+            </a:r>
+          </a:p>
+          <a:p>
+            <a:r>
+              <a:t>brief's two lines (six letters, then three numbers), the sentence, and the notebook's nine TODO</a:t>
+            </a:r>
+          </a:p>
+          <a:p>
+            <a:r>
+              <a:t>picks on one more line.</a:t>
             </a:r>
           </a:p>
           <a:p>
@@ -2052,12 +2062,12 @@
           <a:lstStyle/>
           <a:p>
             <a:r>
-              <a:t>SELF-STUDY, 4 minutes live if the debrief has time. The key is cbdcaabbc, in the solution</a:t>
-            </a:r>
-          </a:p>
-          <a:p>
-            <a:r>
-              <a:t>notebook, released at the close.</a:t>
+              <a:t>SELF-STUDY, 4 minutes live if the debrief has time. The keys are in the day sheet and the</a:t>
+            </a:r>
+          </a:p>
+          <a:p>
+            <a:r>
+              <a:t>solutions, released at the close.</a:t>
             </a:r>
           </a:p>
         </p:txBody>
@@ -2867,12 +2877,12 @@
           </a:p>
           <a:p>
             <a:r>
-              <a:t>Payback: the median of new customers' first orders; a mean per customer type if the plan targets</a:t>
-            </a:r>
-          </a:p>
-          <a:p>
-            <a:r>
-              <a:t>types separately.</a:t>
+              <a:t>Payback: a mean, because a payback is a total, taken from the segment the spend targets with bulk</a:t>
+            </a:r>
+          </a:p>
+          <a:p>
+            <a:r>
+              <a:t>orders set aside; the median sits beside it as the typical order.</a:t>
             </a:r>
           </a:p>
           <a:p>
@@ -2977,7 +2987,7 @@
           </a:p>
           <a:p>
             <a:r>
-              <a:t>Seventy percent: bought once in this window is a fact and not churn; 9 of 16 bought inside the</a:t>
+              <a:t>Seventy percent: bought once in this window is a fact about the window, and churn is a claim about the future; 9 of 16 bought inside the</a:t>
             </a:r>
           </a:p>
           <a:p>
@@ -3447,7 +3457,17 @@
           <a:lstStyle/>
           <a:p>
             <a:r>
-              <a:t>LIVE, 6 minutes. Walk the four. A and B are small asks in customers' actions; the difference is</a:t>
+              <a:t>LIVE, 7 minutes. Say why the base is the 29: the order at the top of chapter 4's sort carries most</a:t>
+            </a:r>
+          </a:p>
+          <a:p>
+            <a:r>
+              <a:t>of booked revenue, and no offer repeats it; on booked revenue the plan reads 4.5 orders, but each</a:t>
+            </a:r>
+          </a:p>
+          <a:p>
+            <a:r>
+              <a:t>would have to be worth the Rs 18,160 mean. Walk the four. A and B are small asks in customers' actions; the difference is</a:t>
             </a:r>
           </a:p>
           <a:p>
@@ -3542,7 +3562,7 @@
           <a:lstStyle/>
           <a:p>
             <a:r>
-              <a:t>LIVE, 4 minutes. Light the frequency branch on the board tree. Notebook 05's build draws the same</a:t>
+              <a:t>LIVE, 5 minutes. Light the frequency branch on the board tree. Notebook 05's build draws the same</a:t>
             </a:r>
           </a:p>
           <a:p>
@@ -3622,7 +3642,7 @@
           <a:lstStyle/>
           <a:p>
             <a:r>
-              <a:t>LIVE, 3 minutes. Ask for the right number before the next slide; take letters: 20, 21, 10, 11.</a:t>
+              <a:t>LIVE, 4 minutes. Ask for the right number before the next slide; take letters: 20, 21, 10, 11.</a:t>
             </a:r>
           </a:p>
           <a:p>
@@ -3697,7 +3717,7 @@
           <a:lstStyle/>
           <a:p>
             <a:r>
-              <a:t>LIVE, 3 minutes. Work it on the board: Rs 5,44,810 x 1.10 = Rs 5,99,291; x 1.10 again =</a:t>
+              <a:t>LIVE, 4 minutes. Work it on the board: Rs 5,44,810 x 1.10 = Rs 5,99,291; x 1.10 again =</a:t>
             </a:r>
           </a:p>
           <a:p>
@@ -3787,7 +3807,7 @@
           </a:p>
           <a:p>
             <a:r>
-              <a:t>The parts route wins the argument with the slide.</a:t>
+              <a:t>Bring the parts route to marketing: the lift on the lift has its own line.</a:t>
             </a:r>
           </a:p>
           <a:p>
@@ -7150,7 +7170,7 @@
                 </a:solidFill>
                 <a:latin typeface="Georgia"/>
               </a:rPr>
-              <a:t>01</a:t>
+              <a:t>05</a:t>
             </a:r>
           </a:p>
         </p:txBody>
@@ -7220,7 +7240,7 @@
                 </a:solidFill>
                 <a:latin typeface="Georgia"/>
               </a:rPr>
-              <a:t>02</a:t>
+              <a:t>06</a:t>
             </a:r>
           </a:p>
         </p:txBody>
@@ -7290,7 +7310,7 @@
                 </a:solidFill>
                 <a:latin typeface="Georgia"/>
               </a:rPr>
-              <a:t>03</a:t>
+              <a:t>A</a:t>
             </a:r>
           </a:p>
         </p:txBody>
@@ -7360,7 +7380,7 @@
                 </a:solidFill>
                 <a:latin typeface="Georgia"/>
               </a:rPr>
-              <a:t>04</a:t>
+              <a:t>B</a:t>
             </a:r>
           </a:p>
         </p:txBody>
@@ -7430,7 +7450,7 @@
                 </a:solidFill>
                 <a:latin typeface="Georgia"/>
               </a:rPr>
-              <a:t>05</a:t>
+              <a:t>C</a:t>
             </a:r>
           </a:p>
         </p:txBody>
@@ -11150,7 +11170,7 @@
                 </a:solidFill>
                 <a:latin typeface="Calibri"/>
               </a:rPr>
-              <a:t>The cost of cost</a:t>
+              <a:t>Quality, fifteen months on</a:t>
             </a:r>
           </a:p>
         </p:txBody>
@@ -14354,7 +14374,7 @@
                 </a:solidFill>
                 <a:latin typeface="Georgia"/>
               </a:rPr>
-              <a:t>Question: 16 of 23 bought once. How many lost?</a:t>
+              <a:t>Question: how many of the 16 are lost?</a:t>
             </a:r>
           </a:p>
         </p:txBody>
@@ -21888,7 +21908,7 @@
                 </a:solidFill>
                 <a:latin typeface="Calibri"/>
               </a:rPr>
-              <a:t>A recommendation that holds on one definition only is a coincidence.</a:t>
+              <a:t>Anand asks whether the answer holds on the orders that stayed sold.</a:t>
             </a:r>
           </a:p>
         </p:txBody>
@@ -24055,7 +24075,7 @@
                 </a:solidFill>
                 <a:latin typeface="Calibri"/>
               </a:rPr>
-              <a:t>Nine letters, the numbers each part asks for, and one sentence.</a:t>
+              <a:t>Six letters and three numbers, one sentence, then the notebook's nine picks.</a:t>
             </a:r>
           </a:p>
         </p:txBody>
@@ -28143,7 +28163,7 @@
         </p:nvGraphicFramePr>
         <p:xfrm>
           <a:off x="530352" y="1956816"/>
-          <a:ext cx="11130990" cy="2588768"/>
+          <a:ext cx="11130990" cy="3072384"/>
         </p:xfrm>
         <a:graphic>
           <a:graphicData uri="http://schemas.openxmlformats.org/drawingml/2006/table">
@@ -28152,9 +28172,9 @@
                 <a:tableStyleId>{2D5ABB26-0587-4C30-8999-92F81FD0307C}</a:tableStyleId>
               </a:tblPr>
               <a:tblGrid>
-                <a:gridCol w="2202003"/>
-                <a:gridCol w="4759601"/>
-                <a:gridCol w="4169386"/>
+                <a:gridCol w="2006908"/>
+                <a:gridCol w="5324098"/>
+                <a:gridCol w="3799984"/>
               </a:tblGrid>
               <a:tr h="369824">
                 <a:tc>
@@ -28224,7 +28244,7 @@
                   </a:tcPr>
                 </a:tc>
               </a:tr>
-              <a:tr h="369824">
+              <a:tr h="611632">
                 <a:tc>
                   <a:txBody>
                     <a:bodyPr/>
@@ -28292,7 +28312,7 @@
                   </a:tcPr>
                 </a:tc>
               </a:tr>
-              <a:tr h="369824">
+              <a:tr h="611632">
                 <a:tc>
                   <a:txBody>
                     <a:bodyPr/>
@@ -28327,7 +28347,7 @@
                           </a:solidFill>
                           <a:latin typeface="Calibri"/>
                         </a:rPr>
-                        <a:t>Orders x AOV must land on its own revenue.</a:t>
+                        <a:t>AOV x the 30 orders the revenue covers must give it back.</a:t>
                       </a:r>
                     </a:p>
                   </a:txBody>
@@ -33283,7 +33303,7 @@
                           </a:solidFill>
                           <a:latin typeface="Calibri"/>
                         </a:rPr>
-                        <a:t>Growth against the 15 percent plan, Rs 81,722 more on this extract</a:t>
+                        <a:t>Growth against the 15 percent plan, sized on the 29 everyday orders</a:t>
                       </a:r>
                     </a:p>
                   </a:txBody>
@@ -37773,7 +37793,7 @@
                 </a:solidFill>
                 <a:latin typeface="Calibri"/>
               </a:rPr>
-              <a:t>"A share is only as strong as the orders behind it. Count them and split them by status, and a 91.6 percent headline turns into two leaks and a branch that stayed where it was."</a:t>
+              <a:t>"Count the orders behind a share before you show it. Count them and split them by status, and a 91.6 percent headline turns into two leaks and a branch that stayed where it was."</a:t>
             </a:r>
           </a:p>
         </p:txBody>
@@ -43319,7 +43339,7 @@
                 </a:solidFill>
                 <a:latin typeface="Calibri"/>
               </a:rPr>
-              <a:t>Ungraded: it shows what the day left in the room.</a:t>
+              <a:t>The Kahoot is ungraded, and it shows which traps the room still falls for.</a:t>
             </a:r>
           </a:p>
         </p:txBody>
@@ -46305,7 +46325,7 @@
                 </a:solidFill>
                 <a:latin typeface="Calibri"/>
               </a:rPr>
-              <a:t>Name the definition before the number: booked, not cancelled, or delivered.</a:t>
+              <a:t>Name the definition before the number: booked, "not cancelled", or delivered.</a:t>
             </a:r>
           </a:p>
         </p:txBody>
@@ -49125,7 +49145,7 @@
                 </a:solidFill>
                 <a:latin typeface="Georgia"/>
               </a:rPr>
-              <a:t>The plan asks 3.45 customers or 4.5 orders</a:t>
+              <a:t>The plan asks 3.3 customers or 4.35 orders</a:t>
             </a:r>
           </a:p>
         </p:txBody>
@@ -49160,7 +49180,7 @@
                 </a:solidFill>
                 <a:latin typeface="Calibri"/>
               </a:rPr>
-              <a:t>Each branch moved alone, sized on this file, with the evidence the file holds for it.</a:t>
+              <a:t>Each branch alone, on the 29 everyday orders: Rs 64,810, and Rs 9,722 more.</a:t>
             </a:r>
           </a:p>
         </p:txBody>
@@ -49291,7 +49311,7 @@
                           </a:solidFill>
                           <a:latin typeface="Calibri"/>
                         </a:rPr>
-                        <a:t>3.45 more who buy like today's</a:t>
+                        <a:t>3.3 more who buy like today's</a:t>
                       </a:r>
                     </a:p>
                   </a:txBody>
@@ -49359,7 +49379,7 @@
                           </a:solidFill>
                           <a:latin typeface="Calibri"/>
                         </a:rPr>
-                        <a:t>4.5 more orders from the same 23</a:t>
+                        <a:t>4.35 more orders from the same 22</a:t>
                       </a:r>
                     </a:p>
                   </a:txBody>
@@ -49381,7 +49401,7 @@
                           </a:solidFill>
                           <a:latin typeface="Calibri"/>
                         </a:rPr>
-                        <a:t>7 of 23 already came back.</a:t>
+                        <a:t>7 already came back.</a:t>
                       </a:r>
                     </a:p>
                   </a:txBody>
@@ -49427,7 +49447,7 @@
                           </a:solidFill>
                           <a:latin typeface="Calibri"/>
                         </a:rPr>
-                        <a:t>Rs 2,724 more on every order</a:t>
+                        <a:t>Rs 335 more on every order</a:t>
                       </a:r>
                     </a:p>
                   </a:txBody>
@@ -49718,7 +49738,7 @@
                 </a:solidFill>
                 <a:latin typeface="Calibri"/>
               </a:rPr>
-              <a:t>B is the best fit: about 5 of the 16 one-time buyers returning once carries the plan, and a retention test costs a reminder to people already on the list.</a:t>
+              <a:t>B is the best fit: 4 or 5 of the 15 one-time buyers returning once at a typical order carries the plan, and a retention test costs a reminder to people already on the list.</a:t>
             </a:r>
           </a:p>
         </p:txBody>

--- a/content/W01/D1/slides/C2_W01_D01_half2_STUDENT.pptx
+++ b/content/W01/D1/slides/C2_W01_D01_half2_STUDENT.pptx
@@ -541,7 +541,7 @@
           <a:lstStyle/>
           <a:p>
             <a:r>
-              <a:t>LIVE, 1 minute. The board tree from the morning is still up: 23 customers, 1.30 orders each,</a:t>
+              <a:t>On screen before the clock starts. The board tree from the morning is still up: 23 customers, 1.30 orders each,</a:t>
             </a:r>
           </a:p>
           <a:p>
@@ -946,7 +946,7 @@
           </a:p>
           <a:p>
             <a:r>
-              <a:t>Transition: the number most likely to be misread.</a:t>
+              <a:t>Transition: build the first draft.</a:t>
             </a:r>
           </a:p>
         </p:txBody>
@@ -3576,7 +3576,7 @@
           <a:lstStyle/>
           <a:p>
             <a:r>
-              <a:t>LIVE, 4 minutes. Ask for the right number before the next slide; take letters: 20, 21, 10, 11.</a:t>
+              <a:t>LIVE, 4 minutes. Ask for the right number before the next slide; take hands for 20, 21, 10 or 11.</a:t>
             </a:r>
           </a:p>
           <a:p>
@@ -14497,7 +14497,7 @@
         <p:spPr>
           <a:xfrm>
             <a:off x="530352" y="1956816"/>
-            <a:ext cx="11130991" cy="1074420"/>
+            <a:ext cx="11130991" cy="807720"/>
           </a:xfrm>
           <a:prstGeom prst="roundRect">
             <a:avLst>
@@ -14545,7 +14545,7 @@
         <p:spPr>
           <a:xfrm>
             <a:off x="676656" y="2084832"/>
-            <a:ext cx="45720" cy="818388"/>
+            <a:ext cx="45720" cy="551688"/>
           </a:xfrm>
           <a:prstGeom prst="roundRect">
             <a:avLst>
@@ -14591,7 +14591,7 @@
         <p:spPr>
           <a:xfrm>
             <a:off x="877824" y="2075688"/>
-            <a:ext cx="10564063" cy="891540"/>
+            <a:ext cx="10564063" cy="624840"/>
           </a:xfrm>
           <a:prstGeom prst="rect">
             <a:avLst/>
@@ -14620,7 +14620,7 @@
                 </a:solidFill>
                 <a:latin typeface="Calibri"/>
               </a:rPr>
-              <a:t>What share of Kalpa's customers can you call lost: a) about 70 percent, 16 of 23; b) 30 percent, the ones who came back; c) none from this file alone, and some are too recent to judge; d) all the one-time buyers?</a:t>
+              <a:t>What share of Kalpa's customers can you call lost: a) about 70 percent, 16 of 23; b) 30 percent, the ones who came back; c) none yet from this file; some are too recent; d) all the one-time buyers?</a:t>
             </a:r>
           </a:p>
         </p:txBody>
@@ -14641,7 +14641,7 @@
         </p:blipFill>
         <p:spPr>
           <a:xfrm>
-            <a:off x="3524097" y="3195828"/>
+            <a:off x="3524097" y="2929128"/>
             <a:ext cx="5143500" cy="2028825"/>
           </a:xfrm>
           <a:prstGeom prst="rect">
@@ -15864,7 +15864,7 @@
                 </a:solidFill>
                 <a:latin typeface="Calibri"/>
               </a:rPr>
-              <a:t>bought in the last 45 days</a:t>
+              <a:t>under 45 days before the end</a:t>
             </a:r>
           </a:p>
         </p:txBody>
@@ -35329,7 +35329,7 @@
                 </a:solidFill>
                 <a:latin typeface="Georgia"/>
               </a:rPr>
-              <a:t>On consumer orders, web leads and half comes back</a:t>
+              <a:t>Web leads consumer sales; half its orders return</a:t>
             </a:r>
           </a:p>
         </p:txBody>
@@ -35422,7 +35422,7 @@
                 </a:solidFill>
                 <a:latin typeface="Calibri"/>
               </a:rPr>
-              <a:t>Web books the most, Rs 27,290, and 5 of its 10 orders came back for Rs 14,970. App kept all 10, Rs 18,600.</a:t>
+              <a:t>Web books the most, Rs 27,290, and 5 of its 10 orders were returned, Rs 14,970. App kept all 10, Rs 18,600.</a:t>
             </a:r>
           </a:p>
         </p:txBody>
@@ -42117,7 +42117,7 @@
                 </a:solidFill>
                 <a:latin typeface="Calibri"/>
               </a:rPr>
-              <a:t>one per chapter trap, and two more</a:t>
+              <a:t>one per chapter, two on tree and discount</a:t>
             </a:r>
           </a:p>
         </p:txBody>
@@ -47853,7 +47853,7 @@
                 </a:solidFill>
                 <a:latin typeface="Calibri"/>
               </a:rPr>
-              <a:t>Each branch alone, on the 29 everyday orders: Rs 64,810, and Rs 9,722 more.</a:t>
+              <a:t>The 29 everyday orders: 22 customers, 15 bought once; Rs 9,722 more.</a:t>
             </a:r>
           </a:p>
         </p:txBody>

--- a/content/W01/D1/slides/C2_W01_D01_half2_STUDENT.pptx
+++ b/content/W01/D1/slides/C2_W01_D01_half2_STUDENT.pptx
@@ -14497,7 +14497,7 @@
         <p:spPr>
           <a:xfrm>
             <a:off x="530352" y="1956816"/>
-            <a:ext cx="11130991" cy="807720"/>
+            <a:ext cx="11130991" cy="1074420"/>
           </a:xfrm>
           <a:prstGeom prst="roundRect">
             <a:avLst>
@@ -14545,7 +14545,7 @@
         <p:spPr>
           <a:xfrm>
             <a:off x="676656" y="2084832"/>
-            <a:ext cx="45720" cy="551688"/>
+            <a:ext cx="45720" cy="818388"/>
           </a:xfrm>
           <a:prstGeom prst="roundRect">
             <a:avLst>
@@ -14591,7 +14591,7 @@
         <p:spPr>
           <a:xfrm>
             <a:off x="877824" y="2075688"/>
-            <a:ext cx="10564063" cy="624840"/>
+            <a:ext cx="10564063" cy="891540"/>
           </a:xfrm>
           <a:prstGeom prst="rect">
             <a:avLst/>
@@ -14620,7 +14620,7 @@
                 </a:solidFill>
                 <a:latin typeface="Calibri"/>
               </a:rPr>
-              <a:t>What share of Kalpa's customers can you call lost: a) about 70 percent, 16 of 23; b) 30 percent, the ones who came back; c) none yet from this file; some are too recent; d) all the one-time buyers?</a:t>
+              <a:t>Of the 16 who bought once, how many can you call lost from this file: a) all 16, which is 70 percent of 23 customers; b) 9, the ones who bought most recently; c) at most 7, the ones past the usual gap; d) none, since 7 customers did come back?</a:t>
             </a:r>
           </a:p>
         </p:txBody>
@@ -14641,7 +14641,7 @@
         </p:blipFill>
         <p:spPr>
           <a:xfrm>
-            <a:off x="3524097" y="2929128"/>
+            <a:off x="3524097" y="3195828"/>
             <a:ext cx="5143500" cy="2028825"/>
           </a:xfrm>
           <a:prstGeom prst="rect">
@@ -42117,7 +42117,7 @@
                 </a:solidFill>
                 <a:latin typeface="Calibri"/>
               </a:rPr>
-              <a:t>one per chapter, two on tree and discount</a:t>
+              <a:t>one per chapter, the tree, a second on customers</a:t>
             </a:r>
           </a:p>
         </p:txBody>
